--- a/Copy/Technical_Architecture_Release1_Presentation.pptx
+++ b/Copy/Technical_Architecture_Release1_Presentation.pptx
@@ -4100,7 +4100,7 @@
         <p:spPr>
           <a:xfrm>
             <a:off x="310896" y="1298448"/>
-            <a:ext cx="1495044" cy="329184"/>
+            <a:ext cx="1495044" cy="475488"/>
           </a:xfrm>
           <a:prstGeom prst="roundRect">
             <a:avLst>
@@ -4148,7 +4148,7 @@
         <p:spPr>
           <a:xfrm>
             <a:off x="310896" y="1325880"/>
-            <a:ext cx="27432" cy="274320"/>
+            <a:ext cx="27432" cy="420624"/>
           </a:xfrm>
           <a:prstGeom prst="rect">
             <a:avLst/>
@@ -4263,8 +4263,8 @@
         </p:nvSpPr>
         <p:spPr>
           <a:xfrm>
-            <a:off x="310896" y="1655064"/>
-            <a:ext cx="1495044" cy="329184"/>
+            <a:off x="310896" y="1837944"/>
+            <a:ext cx="1495044" cy="475488"/>
           </a:xfrm>
           <a:prstGeom prst="roundRect">
             <a:avLst>
@@ -4311,8 +4311,8 @@
         </p:nvSpPr>
         <p:spPr>
           <a:xfrm>
-            <a:off x="310896" y="1682496"/>
-            <a:ext cx="27432" cy="274320"/>
+            <a:off x="310896" y="1865376"/>
+            <a:ext cx="27432" cy="420624"/>
           </a:xfrm>
           <a:prstGeom prst="rect">
             <a:avLst/>
@@ -4355,7 +4355,7 @@
         </p:nvSpPr>
         <p:spPr>
           <a:xfrm>
-            <a:off x="384048" y="1673352"/>
+            <a:off x="384048" y="1856232"/>
             <a:ext cx="1367028" cy="137160"/>
           </a:xfrm>
           <a:prstGeom prst="rect">
@@ -4391,7 +4391,7 @@
         </p:nvSpPr>
         <p:spPr>
           <a:xfrm>
-            <a:off x="384048" y="1810512"/>
+            <a:off x="384048" y="1993392"/>
             <a:ext cx="1367028" cy="137160"/>
           </a:xfrm>
           <a:prstGeom prst="rect">
@@ -4427,8 +4427,8 @@
         </p:nvSpPr>
         <p:spPr>
           <a:xfrm>
-            <a:off x="310896" y="2011680"/>
-            <a:ext cx="1495044" cy="329184"/>
+            <a:off x="310896" y="2377440"/>
+            <a:ext cx="1495044" cy="475488"/>
           </a:xfrm>
           <a:prstGeom prst="roundRect">
             <a:avLst>
@@ -4475,8 +4475,8 @@
         </p:nvSpPr>
         <p:spPr>
           <a:xfrm>
-            <a:off x="310896" y="2039112"/>
-            <a:ext cx="27432" cy="274320"/>
+            <a:off x="310896" y="2404872"/>
+            <a:ext cx="27432" cy="420624"/>
           </a:xfrm>
           <a:prstGeom prst="rect">
             <a:avLst/>
@@ -4519,7 +4519,7 @@
         </p:nvSpPr>
         <p:spPr>
           <a:xfrm>
-            <a:off x="384048" y="2029968"/>
+            <a:off x="384048" y="2395728"/>
             <a:ext cx="1367028" cy="137160"/>
           </a:xfrm>
           <a:prstGeom prst="rect">
@@ -4555,7 +4555,7 @@
         </p:nvSpPr>
         <p:spPr>
           <a:xfrm>
-            <a:off x="384048" y="2167128"/>
+            <a:off x="384048" y="2532888"/>
             <a:ext cx="1367028" cy="137160"/>
           </a:xfrm>
           <a:prstGeom prst="rect">
@@ -4591,8 +4591,8 @@
         </p:nvSpPr>
         <p:spPr>
           <a:xfrm>
-            <a:off x="310896" y="2368296"/>
-            <a:ext cx="1495044" cy="329184"/>
+            <a:off x="310896" y="2916936"/>
+            <a:ext cx="1495044" cy="475488"/>
           </a:xfrm>
           <a:prstGeom prst="roundRect">
             <a:avLst>
@@ -4639,8 +4639,8 @@
         </p:nvSpPr>
         <p:spPr>
           <a:xfrm>
-            <a:off x="310896" y="2395728"/>
-            <a:ext cx="27432" cy="274320"/>
+            <a:off x="310896" y="2944368"/>
+            <a:ext cx="27432" cy="420624"/>
           </a:xfrm>
           <a:prstGeom prst="rect">
             <a:avLst/>
@@ -4683,7 +4683,7 @@
         </p:nvSpPr>
         <p:spPr>
           <a:xfrm>
-            <a:off x="384048" y="2386584"/>
+            <a:off x="384048" y="2935224"/>
             <a:ext cx="1367028" cy="137160"/>
           </a:xfrm>
           <a:prstGeom prst="rect">
@@ -4719,7 +4719,7 @@
         </p:nvSpPr>
         <p:spPr>
           <a:xfrm>
-            <a:off x="384048" y="2523744"/>
+            <a:off x="384048" y="3072384"/>
             <a:ext cx="1367028" cy="137160"/>
           </a:xfrm>
           <a:prstGeom prst="rect">
@@ -4755,8 +4755,8 @@
         </p:nvSpPr>
         <p:spPr>
           <a:xfrm>
-            <a:off x="310896" y="2724912"/>
-            <a:ext cx="1495044" cy="329184"/>
+            <a:off x="310896" y="3456432"/>
+            <a:ext cx="1495044" cy="475488"/>
           </a:xfrm>
           <a:prstGeom prst="roundRect">
             <a:avLst>
@@ -4803,8 +4803,8 @@
         </p:nvSpPr>
         <p:spPr>
           <a:xfrm>
-            <a:off x="310896" y="2752344"/>
-            <a:ext cx="27432" cy="274320"/>
+            <a:off x="310896" y="3483864"/>
+            <a:ext cx="27432" cy="420624"/>
           </a:xfrm>
           <a:prstGeom prst="rect">
             <a:avLst/>
@@ -4847,7 +4847,7 @@
         </p:nvSpPr>
         <p:spPr>
           <a:xfrm>
-            <a:off x="384048" y="2743200"/>
+            <a:off x="384048" y="3474720"/>
             <a:ext cx="1367028" cy="137160"/>
           </a:xfrm>
           <a:prstGeom prst="rect">
@@ -4883,7 +4883,7 @@
         </p:nvSpPr>
         <p:spPr>
           <a:xfrm>
-            <a:off x="384048" y="2880360"/>
+            <a:off x="384048" y="3611880"/>
             <a:ext cx="1367028" cy="137160"/>
           </a:xfrm>
           <a:prstGeom prst="rect">
@@ -4919,8 +4919,8 @@
         </p:nvSpPr>
         <p:spPr>
           <a:xfrm>
-            <a:off x="310896" y="3081528"/>
-            <a:ext cx="1495044" cy="329184"/>
+            <a:off x="310896" y="3995928"/>
+            <a:ext cx="1495044" cy="475488"/>
           </a:xfrm>
           <a:prstGeom prst="roundRect">
             <a:avLst>
@@ -4967,8 +4967,8 @@
         </p:nvSpPr>
         <p:spPr>
           <a:xfrm>
-            <a:off x="310896" y="3108960"/>
-            <a:ext cx="27432" cy="274320"/>
+            <a:off x="310896" y="4023360"/>
+            <a:ext cx="27432" cy="420624"/>
           </a:xfrm>
           <a:prstGeom prst="rect">
             <a:avLst/>
@@ -5011,7 +5011,7 @@
         </p:nvSpPr>
         <p:spPr>
           <a:xfrm>
-            <a:off x="384048" y="3099816"/>
+            <a:off x="384048" y="4014216"/>
             <a:ext cx="1367028" cy="137160"/>
           </a:xfrm>
           <a:prstGeom prst="rect">
@@ -5047,7 +5047,7 @@
         </p:nvSpPr>
         <p:spPr>
           <a:xfrm>
-            <a:off x="384048" y="3236976"/>
+            <a:off x="384048" y="4151376"/>
             <a:ext cx="1367028" cy="137160"/>
           </a:xfrm>
           <a:prstGeom prst="rect">
@@ -5083,8 +5083,8 @@
         </p:nvSpPr>
         <p:spPr>
           <a:xfrm>
-            <a:off x="310896" y="3438144"/>
-            <a:ext cx="1495044" cy="329184"/>
+            <a:off x="310896" y="4535424"/>
+            <a:ext cx="1495044" cy="475488"/>
           </a:xfrm>
           <a:prstGeom prst="roundRect">
             <a:avLst>
@@ -5131,8 +5131,8 @@
         </p:nvSpPr>
         <p:spPr>
           <a:xfrm>
-            <a:off x="310896" y="3465576"/>
-            <a:ext cx="27432" cy="274320"/>
+            <a:off x="310896" y="4562856"/>
+            <a:ext cx="27432" cy="420624"/>
           </a:xfrm>
           <a:prstGeom prst="rect">
             <a:avLst/>
@@ -5175,7 +5175,7 @@
         </p:nvSpPr>
         <p:spPr>
           <a:xfrm>
-            <a:off x="384048" y="3456432"/>
+            <a:off x="384048" y="4553712"/>
             <a:ext cx="1367028" cy="137160"/>
           </a:xfrm>
           <a:prstGeom prst="rect">
@@ -5211,7 +5211,7 @@
         </p:nvSpPr>
         <p:spPr>
           <a:xfrm>
-            <a:off x="384048" y="3593592"/>
+            <a:off x="384048" y="4690872"/>
             <a:ext cx="1367028" cy="137160"/>
           </a:xfrm>
           <a:prstGeom prst="rect">
@@ -5492,7 +5492,7 @@
         <p:spPr>
           <a:xfrm>
             <a:off x="2098548" y="1298448"/>
-            <a:ext cx="1495044" cy="329184"/>
+            <a:ext cx="1495044" cy="475488"/>
           </a:xfrm>
           <a:prstGeom prst="roundRect">
             <a:avLst>
@@ -5540,7 +5540,7 @@
         <p:spPr>
           <a:xfrm>
             <a:off x="2098548" y="1325880"/>
-            <a:ext cx="27432" cy="274320"/>
+            <a:ext cx="27432" cy="420624"/>
           </a:xfrm>
           <a:prstGeom prst="rect">
             <a:avLst/>
@@ -5655,8 +5655,8 @@
         </p:nvSpPr>
         <p:spPr>
           <a:xfrm>
-            <a:off x="2098548" y="1655064"/>
-            <a:ext cx="1495044" cy="329184"/>
+            <a:off x="2098548" y="1837944"/>
+            <a:ext cx="1495044" cy="475488"/>
           </a:xfrm>
           <a:prstGeom prst="roundRect">
             <a:avLst>
@@ -5703,8 +5703,8 @@
         </p:nvSpPr>
         <p:spPr>
           <a:xfrm>
-            <a:off x="2098548" y="1682496"/>
-            <a:ext cx="27432" cy="274320"/>
+            <a:off x="2098548" y="1865376"/>
+            <a:ext cx="27432" cy="420624"/>
           </a:xfrm>
           <a:prstGeom prst="rect">
             <a:avLst/>
@@ -5747,7 +5747,7 @@
         </p:nvSpPr>
         <p:spPr>
           <a:xfrm>
-            <a:off x="2171700" y="1673352"/>
+            <a:off x="2171700" y="1856232"/>
             <a:ext cx="1367028" cy="137160"/>
           </a:xfrm>
           <a:prstGeom prst="rect">
@@ -5783,7 +5783,7 @@
         </p:nvSpPr>
         <p:spPr>
           <a:xfrm>
-            <a:off x="2171700" y="1810512"/>
+            <a:off x="2171700" y="1993392"/>
             <a:ext cx="1367028" cy="137160"/>
           </a:xfrm>
           <a:prstGeom prst="rect">
@@ -5819,8 +5819,8 @@
         </p:nvSpPr>
         <p:spPr>
           <a:xfrm>
-            <a:off x="2098548" y="2011680"/>
-            <a:ext cx="1495044" cy="329184"/>
+            <a:off x="2098548" y="2377440"/>
+            <a:ext cx="1495044" cy="475488"/>
           </a:xfrm>
           <a:prstGeom prst="roundRect">
             <a:avLst>
@@ -5867,8 +5867,8 @@
         </p:nvSpPr>
         <p:spPr>
           <a:xfrm>
-            <a:off x="2098548" y="2039112"/>
-            <a:ext cx="27432" cy="274320"/>
+            <a:off x="2098548" y="2404872"/>
+            <a:ext cx="27432" cy="420624"/>
           </a:xfrm>
           <a:prstGeom prst="rect">
             <a:avLst/>
@@ -5911,7 +5911,7 @@
         </p:nvSpPr>
         <p:spPr>
           <a:xfrm>
-            <a:off x="2171700" y="2029968"/>
+            <a:off x="2171700" y="2395728"/>
             <a:ext cx="1367028" cy="137160"/>
           </a:xfrm>
           <a:prstGeom prst="rect">
@@ -5947,7 +5947,7 @@
         </p:nvSpPr>
         <p:spPr>
           <a:xfrm>
-            <a:off x="2171700" y="2167128"/>
+            <a:off x="2171700" y="2532888"/>
             <a:ext cx="1367028" cy="137160"/>
           </a:xfrm>
           <a:prstGeom prst="rect">
@@ -5983,8 +5983,8 @@
         </p:nvSpPr>
         <p:spPr>
           <a:xfrm>
-            <a:off x="2098548" y="2368296"/>
-            <a:ext cx="1495044" cy="329184"/>
+            <a:off x="2098548" y="2916936"/>
+            <a:ext cx="1495044" cy="475488"/>
           </a:xfrm>
           <a:prstGeom prst="roundRect">
             <a:avLst>
@@ -6031,8 +6031,8 @@
         </p:nvSpPr>
         <p:spPr>
           <a:xfrm>
-            <a:off x="2098548" y="2395728"/>
-            <a:ext cx="27432" cy="274320"/>
+            <a:off x="2098548" y="2944368"/>
+            <a:ext cx="27432" cy="420624"/>
           </a:xfrm>
           <a:prstGeom prst="rect">
             <a:avLst/>
@@ -6075,7 +6075,7 @@
         </p:nvSpPr>
         <p:spPr>
           <a:xfrm>
-            <a:off x="2171700" y="2386584"/>
+            <a:off x="2171700" y="2935224"/>
             <a:ext cx="1367028" cy="137160"/>
           </a:xfrm>
           <a:prstGeom prst="rect">
@@ -6111,7 +6111,7 @@
         </p:nvSpPr>
         <p:spPr>
           <a:xfrm>
-            <a:off x="2171700" y="2523744"/>
+            <a:off x="2171700" y="3072384"/>
             <a:ext cx="1367028" cy="137160"/>
           </a:xfrm>
           <a:prstGeom prst="rect">
@@ -6147,7 +6147,7 @@
         </p:nvSpPr>
         <p:spPr>
           <a:xfrm>
-            <a:off x="3090672" y="2386584"/>
+            <a:off x="3090672" y="2935224"/>
             <a:ext cx="475488" cy="118872"/>
           </a:xfrm>
           <a:prstGeom prst="roundRect">
@@ -6195,7 +6195,7 @@
         </p:nvSpPr>
         <p:spPr>
           <a:xfrm>
-            <a:off x="3090672" y="2386584"/>
+            <a:off x="3090672" y="2935224"/>
             <a:ext cx="475488" cy="118872"/>
           </a:xfrm>
           <a:prstGeom prst="rect">
@@ -6476,7 +6476,7 @@
         <p:spPr>
           <a:xfrm>
             <a:off x="3886200" y="1298448"/>
-            <a:ext cx="1495044" cy="329184"/>
+            <a:ext cx="1495044" cy="475488"/>
           </a:xfrm>
           <a:prstGeom prst="roundRect">
             <a:avLst>
@@ -6524,7 +6524,7 @@
         <p:spPr>
           <a:xfrm>
             <a:off x="3886200" y="1325880"/>
-            <a:ext cx="27432" cy="274320"/>
+            <a:ext cx="27432" cy="420624"/>
           </a:xfrm>
           <a:prstGeom prst="rect">
             <a:avLst/>
@@ -6639,8 +6639,8 @@
         </p:nvSpPr>
         <p:spPr>
           <a:xfrm>
-            <a:off x="3886200" y="1655064"/>
-            <a:ext cx="1495044" cy="329184"/>
+            <a:off x="3886200" y="1837944"/>
+            <a:ext cx="1495044" cy="475488"/>
           </a:xfrm>
           <a:prstGeom prst="roundRect">
             <a:avLst>
@@ -6687,8 +6687,8 @@
         </p:nvSpPr>
         <p:spPr>
           <a:xfrm>
-            <a:off x="3886200" y="1682496"/>
-            <a:ext cx="27432" cy="274320"/>
+            <a:off x="3886200" y="1865376"/>
+            <a:ext cx="27432" cy="420624"/>
           </a:xfrm>
           <a:prstGeom prst="rect">
             <a:avLst/>
@@ -6731,7 +6731,7 @@
         </p:nvSpPr>
         <p:spPr>
           <a:xfrm>
-            <a:off x="3959352" y="1673352"/>
+            <a:off x="3959352" y="1856232"/>
             <a:ext cx="1367028" cy="137160"/>
           </a:xfrm>
           <a:prstGeom prst="rect">
@@ -6767,7 +6767,7 @@
         </p:nvSpPr>
         <p:spPr>
           <a:xfrm>
-            <a:off x="3959352" y="1810512"/>
+            <a:off x="3959352" y="1993392"/>
             <a:ext cx="1367028" cy="137160"/>
           </a:xfrm>
           <a:prstGeom prst="rect">
@@ -6803,8 +6803,8 @@
         </p:nvSpPr>
         <p:spPr>
           <a:xfrm>
-            <a:off x="3886200" y="2011680"/>
-            <a:ext cx="1495044" cy="329184"/>
+            <a:off x="3886200" y="2377440"/>
+            <a:ext cx="1495044" cy="475488"/>
           </a:xfrm>
           <a:prstGeom prst="roundRect">
             <a:avLst>
@@ -6851,8 +6851,8 @@
         </p:nvSpPr>
         <p:spPr>
           <a:xfrm>
-            <a:off x="3886200" y="2039112"/>
-            <a:ext cx="27432" cy="274320"/>
+            <a:off x="3886200" y="2404872"/>
+            <a:ext cx="27432" cy="420624"/>
           </a:xfrm>
           <a:prstGeom prst="rect">
             <a:avLst/>
@@ -6895,7 +6895,7 @@
         </p:nvSpPr>
         <p:spPr>
           <a:xfrm>
-            <a:off x="3959352" y="2029968"/>
+            <a:off x="3959352" y="2395728"/>
             <a:ext cx="1367028" cy="137160"/>
           </a:xfrm>
           <a:prstGeom prst="rect">
@@ -6931,7 +6931,7 @@
         </p:nvSpPr>
         <p:spPr>
           <a:xfrm>
-            <a:off x="3959352" y="2167128"/>
+            <a:off x="3959352" y="2532888"/>
             <a:ext cx="1367028" cy="137160"/>
           </a:xfrm>
           <a:prstGeom prst="rect">
@@ -6967,8 +6967,8 @@
         </p:nvSpPr>
         <p:spPr>
           <a:xfrm>
-            <a:off x="3886200" y="2368296"/>
-            <a:ext cx="1495044" cy="329184"/>
+            <a:off x="3886200" y="2916936"/>
+            <a:ext cx="1495044" cy="475488"/>
           </a:xfrm>
           <a:prstGeom prst="roundRect">
             <a:avLst>
@@ -7015,8 +7015,8 @@
         </p:nvSpPr>
         <p:spPr>
           <a:xfrm>
-            <a:off x="3886200" y="2395728"/>
-            <a:ext cx="27432" cy="274320"/>
+            <a:off x="3886200" y="2944368"/>
+            <a:ext cx="27432" cy="420624"/>
           </a:xfrm>
           <a:prstGeom prst="rect">
             <a:avLst/>
@@ -7059,7 +7059,7 @@
         </p:nvSpPr>
         <p:spPr>
           <a:xfrm>
-            <a:off x="3959352" y="2386584"/>
+            <a:off x="3959352" y="2935224"/>
             <a:ext cx="1367028" cy="137160"/>
           </a:xfrm>
           <a:prstGeom prst="rect">
@@ -7095,7 +7095,7 @@
         </p:nvSpPr>
         <p:spPr>
           <a:xfrm>
-            <a:off x="3959352" y="2523744"/>
+            <a:off x="3959352" y="3072384"/>
             <a:ext cx="1367028" cy="137160"/>
           </a:xfrm>
           <a:prstGeom prst="rect">
@@ -7131,8 +7131,8 @@
         </p:nvSpPr>
         <p:spPr>
           <a:xfrm>
-            <a:off x="3886200" y="2724912"/>
-            <a:ext cx="1495044" cy="329184"/>
+            <a:off x="3886200" y="3456432"/>
+            <a:ext cx="1495044" cy="475488"/>
           </a:xfrm>
           <a:prstGeom prst="roundRect">
             <a:avLst>
@@ -7179,8 +7179,8 @@
         </p:nvSpPr>
         <p:spPr>
           <a:xfrm>
-            <a:off x="3886200" y="2752344"/>
-            <a:ext cx="27432" cy="274320"/>
+            <a:off x="3886200" y="3483864"/>
+            <a:ext cx="27432" cy="420624"/>
           </a:xfrm>
           <a:prstGeom prst="rect">
             <a:avLst/>
@@ -7223,7 +7223,7 @@
         </p:nvSpPr>
         <p:spPr>
           <a:xfrm>
-            <a:off x="3959352" y="2743200"/>
+            <a:off x="3959352" y="3474720"/>
             <a:ext cx="1367028" cy="137160"/>
           </a:xfrm>
           <a:prstGeom prst="rect">
@@ -7259,7 +7259,7 @@
         </p:nvSpPr>
         <p:spPr>
           <a:xfrm>
-            <a:off x="3959352" y="2880360"/>
+            <a:off x="3959352" y="3611880"/>
             <a:ext cx="1367028" cy="137160"/>
           </a:xfrm>
           <a:prstGeom prst="rect">
@@ -7295,7 +7295,7 @@
         </p:nvSpPr>
         <p:spPr>
           <a:xfrm>
-            <a:off x="4878324" y="2743200"/>
+            <a:off x="4878324" y="3474720"/>
             <a:ext cx="475488" cy="118872"/>
           </a:xfrm>
           <a:prstGeom prst="roundRect">
@@ -7343,7 +7343,7 @@
         </p:nvSpPr>
         <p:spPr>
           <a:xfrm>
-            <a:off x="4878324" y="2743200"/>
+            <a:off x="4878324" y="3474720"/>
             <a:ext cx="475488" cy="118872"/>
           </a:xfrm>
           <a:prstGeom prst="rect">
@@ -7588,7 +7588,7 @@
         <p:spPr>
           <a:xfrm>
             <a:off x="5673852" y="1298448"/>
-            <a:ext cx="1495044" cy="329184"/>
+            <a:ext cx="1495044" cy="475488"/>
           </a:xfrm>
           <a:prstGeom prst="roundRect">
             <a:avLst>
@@ -7636,7 +7636,7 @@
         <p:spPr>
           <a:xfrm>
             <a:off x="5673852" y="1325880"/>
-            <a:ext cx="27432" cy="274320"/>
+            <a:ext cx="27432" cy="420624"/>
           </a:xfrm>
           <a:prstGeom prst="rect">
             <a:avLst/>
@@ -7751,8 +7751,8 @@
         </p:nvSpPr>
         <p:spPr>
           <a:xfrm>
-            <a:off x="5673852" y="1655064"/>
-            <a:ext cx="1495044" cy="329184"/>
+            <a:off x="5673852" y="1837944"/>
+            <a:ext cx="1495044" cy="475488"/>
           </a:xfrm>
           <a:prstGeom prst="roundRect">
             <a:avLst>
@@ -7799,8 +7799,8 @@
         </p:nvSpPr>
         <p:spPr>
           <a:xfrm>
-            <a:off x="5673852" y="1682496"/>
-            <a:ext cx="27432" cy="274320"/>
+            <a:off x="5673852" y="1865376"/>
+            <a:ext cx="27432" cy="420624"/>
           </a:xfrm>
           <a:prstGeom prst="rect">
             <a:avLst/>
@@ -7843,7 +7843,7 @@
         </p:nvSpPr>
         <p:spPr>
           <a:xfrm>
-            <a:off x="5747004" y="1673352"/>
+            <a:off x="5747004" y="1856232"/>
             <a:ext cx="1367028" cy="137160"/>
           </a:xfrm>
           <a:prstGeom prst="rect">
@@ -7879,7 +7879,7 @@
         </p:nvSpPr>
         <p:spPr>
           <a:xfrm>
-            <a:off x="5747004" y="1810512"/>
+            <a:off x="5747004" y="1993392"/>
             <a:ext cx="1367028" cy="137160"/>
           </a:xfrm>
           <a:prstGeom prst="rect">
@@ -7915,7 +7915,7 @@
         </p:nvSpPr>
         <p:spPr>
           <a:xfrm>
-            <a:off x="6665976" y="1673352"/>
+            <a:off x="6665976" y="1856232"/>
             <a:ext cx="475488" cy="118872"/>
           </a:xfrm>
           <a:prstGeom prst="roundRect">
@@ -7963,7 +7963,7 @@
         </p:nvSpPr>
         <p:spPr>
           <a:xfrm>
-            <a:off x="6665976" y="1673352"/>
+            <a:off x="6665976" y="1856232"/>
             <a:ext cx="475488" cy="118872"/>
           </a:xfrm>
           <a:prstGeom prst="rect">
@@ -7999,8 +7999,8 @@
         </p:nvSpPr>
         <p:spPr>
           <a:xfrm>
-            <a:off x="5673852" y="2011680"/>
-            <a:ext cx="1495044" cy="329184"/>
+            <a:off x="5673852" y="2377440"/>
+            <a:ext cx="1495044" cy="475488"/>
           </a:xfrm>
           <a:prstGeom prst="roundRect">
             <a:avLst>
@@ -8047,8 +8047,8 @@
         </p:nvSpPr>
         <p:spPr>
           <a:xfrm>
-            <a:off x="5673852" y="2039112"/>
-            <a:ext cx="27432" cy="274320"/>
+            <a:off x="5673852" y="2404872"/>
+            <a:ext cx="27432" cy="420624"/>
           </a:xfrm>
           <a:prstGeom prst="rect">
             <a:avLst/>
@@ -8091,7 +8091,7 @@
         </p:nvSpPr>
         <p:spPr>
           <a:xfrm>
-            <a:off x="5747004" y="2029968"/>
+            <a:off x="5747004" y="2395728"/>
             <a:ext cx="1367028" cy="137160"/>
           </a:xfrm>
           <a:prstGeom prst="rect">
@@ -8127,7 +8127,7 @@
         </p:nvSpPr>
         <p:spPr>
           <a:xfrm>
-            <a:off x="5747004" y="2167128"/>
+            <a:off x="5747004" y="2532888"/>
             <a:ext cx="1367028" cy="137160"/>
           </a:xfrm>
           <a:prstGeom prst="rect">
@@ -8163,8 +8163,8 @@
         </p:nvSpPr>
         <p:spPr>
           <a:xfrm>
-            <a:off x="5673852" y="2368296"/>
-            <a:ext cx="1495044" cy="329184"/>
+            <a:off x="5673852" y="2916936"/>
+            <a:ext cx="1495044" cy="475488"/>
           </a:xfrm>
           <a:prstGeom prst="roundRect">
             <a:avLst>
@@ -8211,8 +8211,8 @@
         </p:nvSpPr>
         <p:spPr>
           <a:xfrm>
-            <a:off x="5673852" y="2395728"/>
-            <a:ext cx="27432" cy="274320"/>
+            <a:off x="5673852" y="2944368"/>
+            <a:ext cx="27432" cy="420624"/>
           </a:xfrm>
           <a:prstGeom prst="rect">
             <a:avLst/>
@@ -8255,7 +8255,7 @@
         </p:nvSpPr>
         <p:spPr>
           <a:xfrm>
-            <a:off x="5747004" y="2386584"/>
+            <a:off x="5747004" y="2935224"/>
             <a:ext cx="1367028" cy="137160"/>
           </a:xfrm>
           <a:prstGeom prst="rect">
@@ -8291,7 +8291,7 @@
         </p:nvSpPr>
         <p:spPr>
           <a:xfrm>
-            <a:off x="5747004" y="2523744"/>
+            <a:off x="5747004" y="3072384"/>
             <a:ext cx="1367028" cy="137160"/>
           </a:xfrm>
           <a:prstGeom prst="rect">
@@ -8327,8 +8327,8 @@
         </p:nvSpPr>
         <p:spPr>
           <a:xfrm>
-            <a:off x="5673852" y="2724912"/>
-            <a:ext cx="1495044" cy="329184"/>
+            <a:off x="5673852" y="3456432"/>
+            <a:ext cx="1495044" cy="475488"/>
           </a:xfrm>
           <a:prstGeom prst="roundRect">
             <a:avLst>
@@ -8375,8 +8375,8 @@
         </p:nvSpPr>
         <p:spPr>
           <a:xfrm>
-            <a:off x="5673852" y="2752344"/>
-            <a:ext cx="27432" cy="274320"/>
+            <a:off x="5673852" y="3483864"/>
+            <a:ext cx="27432" cy="420624"/>
           </a:xfrm>
           <a:prstGeom prst="rect">
             <a:avLst/>
@@ -8419,7 +8419,7 @@
         </p:nvSpPr>
         <p:spPr>
           <a:xfrm>
-            <a:off x="5747004" y="2743200"/>
+            <a:off x="5747004" y="3474720"/>
             <a:ext cx="1367028" cy="137160"/>
           </a:xfrm>
           <a:prstGeom prst="rect">
@@ -8455,7 +8455,7 @@
         </p:nvSpPr>
         <p:spPr>
           <a:xfrm>
-            <a:off x="5747004" y="2880360"/>
+            <a:off x="5747004" y="3611880"/>
             <a:ext cx="1367028" cy="137160"/>
           </a:xfrm>
           <a:prstGeom prst="rect">
@@ -8700,7 +8700,7 @@
         <p:spPr>
           <a:xfrm>
             <a:off x="7461504" y="1298448"/>
-            <a:ext cx="1495044" cy="329184"/>
+            <a:ext cx="1495044" cy="475488"/>
           </a:xfrm>
           <a:prstGeom prst="roundRect">
             <a:avLst>
@@ -8748,7 +8748,7 @@
         <p:spPr>
           <a:xfrm>
             <a:off x="7461504" y="1325880"/>
-            <a:ext cx="27432" cy="274320"/>
+            <a:ext cx="27432" cy="420624"/>
           </a:xfrm>
           <a:prstGeom prst="rect">
             <a:avLst/>
@@ -8947,8 +8947,8 @@
         </p:nvSpPr>
         <p:spPr>
           <a:xfrm>
-            <a:off x="7461504" y="1655064"/>
-            <a:ext cx="1495044" cy="329184"/>
+            <a:off x="7461504" y="1837944"/>
+            <a:ext cx="1495044" cy="475488"/>
           </a:xfrm>
           <a:prstGeom prst="roundRect">
             <a:avLst>
@@ -8995,8 +8995,8 @@
         </p:nvSpPr>
         <p:spPr>
           <a:xfrm>
-            <a:off x="7461504" y="1682496"/>
-            <a:ext cx="27432" cy="274320"/>
+            <a:off x="7461504" y="1865376"/>
+            <a:ext cx="27432" cy="420624"/>
           </a:xfrm>
           <a:prstGeom prst="rect">
             <a:avLst/>
@@ -9039,7 +9039,7 @@
         </p:nvSpPr>
         <p:spPr>
           <a:xfrm>
-            <a:off x="7534656" y="1673352"/>
+            <a:off x="7534656" y="1856232"/>
             <a:ext cx="1367028" cy="137160"/>
           </a:xfrm>
           <a:prstGeom prst="rect">
@@ -9075,7 +9075,7 @@
         </p:nvSpPr>
         <p:spPr>
           <a:xfrm>
-            <a:off x="7534656" y="1810512"/>
+            <a:off x="7534656" y="1993392"/>
             <a:ext cx="1367028" cy="137160"/>
           </a:xfrm>
           <a:prstGeom prst="rect">
@@ -9111,8 +9111,8 @@
         </p:nvSpPr>
         <p:spPr>
           <a:xfrm>
-            <a:off x="7461504" y="2011680"/>
-            <a:ext cx="1495044" cy="329184"/>
+            <a:off x="7461504" y="2377440"/>
+            <a:ext cx="1495044" cy="475488"/>
           </a:xfrm>
           <a:prstGeom prst="roundRect">
             <a:avLst>
@@ -9159,8 +9159,8 @@
         </p:nvSpPr>
         <p:spPr>
           <a:xfrm>
-            <a:off x="7461504" y="2039112"/>
-            <a:ext cx="27432" cy="274320"/>
+            <a:off x="7461504" y="2404872"/>
+            <a:ext cx="27432" cy="420624"/>
           </a:xfrm>
           <a:prstGeom prst="rect">
             <a:avLst/>
@@ -9203,7 +9203,7 @@
         </p:nvSpPr>
         <p:spPr>
           <a:xfrm>
-            <a:off x="7534656" y="2029968"/>
+            <a:off x="7534656" y="2395728"/>
             <a:ext cx="1367028" cy="137160"/>
           </a:xfrm>
           <a:prstGeom prst="rect">
@@ -9239,7 +9239,7 @@
         </p:nvSpPr>
         <p:spPr>
           <a:xfrm>
-            <a:off x="7534656" y="2167128"/>
+            <a:off x="7534656" y="2532888"/>
             <a:ext cx="1367028" cy="137160"/>
           </a:xfrm>
           <a:prstGeom prst="rect">
@@ -9275,7 +9275,7 @@
         </p:nvSpPr>
         <p:spPr>
           <a:xfrm>
-            <a:off x="8453628" y="2029968"/>
+            <a:off x="8453628" y="2395728"/>
             <a:ext cx="475488" cy="118872"/>
           </a:xfrm>
           <a:prstGeom prst="roundRect">
@@ -9323,7 +9323,7 @@
         </p:nvSpPr>
         <p:spPr>
           <a:xfrm>
-            <a:off x="8453628" y="2029968"/>
+            <a:off x="8453628" y="2395728"/>
             <a:ext cx="475488" cy="118872"/>
           </a:xfrm>
           <a:prstGeom prst="rect">
@@ -9359,8 +9359,8 @@
         </p:nvSpPr>
         <p:spPr>
           <a:xfrm>
-            <a:off x="7461504" y="2368296"/>
-            <a:ext cx="1495044" cy="329184"/>
+            <a:off x="7461504" y="2916936"/>
+            <a:ext cx="1495044" cy="475488"/>
           </a:xfrm>
           <a:prstGeom prst="roundRect">
             <a:avLst>
@@ -9407,8 +9407,8 @@
         </p:nvSpPr>
         <p:spPr>
           <a:xfrm>
-            <a:off x="7461504" y="2395728"/>
-            <a:ext cx="27432" cy="274320"/>
+            <a:off x="7461504" y="2944368"/>
+            <a:ext cx="27432" cy="420624"/>
           </a:xfrm>
           <a:prstGeom prst="rect">
             <a:avLst/>
@@ -9451,7 +9451,7 @@
         </p:nvSpPr>
         <p:spPr>
           <a:xfrm>
-            <a:off x="7534656" y="2386584"/>
+            <a:off x="7534656" y="2935224"/>
             <a:ext cx="1367028" cy="137160"/>
           </a:xfrm>
           <a:prstGeom prst="rect">
@@ -9487,7 +9487,7 @@
         </p:nvSpPr>
         <p:spPr>
           <a:xfrm>
-            <a:off x="7534656" y="2523744"/>
+            <a:off x="7534656" y="3072384"/>
             <a:ext cx="1367028" cy="137160"/>
           </a:xfrm>
           <a:prstGeom prst="rect">
@@ -9732,7 +9732,7 @@
         <p:spPr>
           <a:xfrm>
             <a:off x="9249156" y="1298448"/>
-            <a:ext cx="1495044" cy="329184"/>
+            <a:ext cx="1495044" cy="475488"/>
           </a:xfrm>
           <a:prstGeom prst="roundRect">
             <a:avLst>
@@ -9780,7 +9780,7 @@
         <p:spPr>
           <a:xfrm>
             <a:off x="9249156" y="1325880"/>
-            <a:ext cx="27432" cy="274320"/>
+            <a:ext cx="27432" cy="420624"/>
           </a:xfrm>
           <a:prstGeom prst="rect">
             <a:avLst/>
@@ -9895,8 +9895,8 @@
         </p:nvSpPr>
         <p:spPr>
           <a:xfrm>
-            <a:off x="9249156" y="1655064"/>
-            <a:ext cx="1495044" cy="329184"/>
+            <a:off x="9249156" y="1837944"/>
+            <a:ext cx="1495044" cy="475488"/>
           </a:xfrm>
           <a:prstGeom prst="roundRect">
             <a:avLst>
@@ -9943,8 +9943,8 @@
         </p:nvSpPr>
         <p:spPr>
           <a:xfrm>
-            <a:off x="9249156" y="1682496"/>
-            <a:ext cx="27432" cy="274320"/>
+            <a:off x="9249156" y="1865376"/>
+            <a:ext cx="27432" cy="420624"/>
           </a:xfrm>
           <a:prstGeom prst="rect">
             <a:avLst/>
@@ -9987,7 +9987,7 @@
         </p:nvSpPr>
         <p:spPr>
           <a:xfrm>
-            <a:off x="9322308" y="1673352"/>
+            <a:off x="9322308" y="1856232"/>
             <a:ext cx="1367028" cy="137160"/>
           </a:xfrm>
           <a:prstGeom prst="rect">
@@ -10023,7 +10023,7 @@
         </p:nvSpPr>
         <p:spPr>
           <a:xfrm>
-            <a:off x="9322308" y="1810512"/>
+            <a:off x="9322308" y="1993392"/>
             <a:ext cx="1367028" cy="137160"/>
           </a:xfrm>
           <a:prstGeom prst="rect">
@@ -10059,8 +10059,8 @@
         </p:nvSpPr>
         <p:spPr>
           <a:xfrm>
-            <a:off x="9249156" y="2011680"/>
-            <a:ext cx="1495044" cy="329184"/>
+            <a:off x="9249156" y="2377440"/>
+            <a:ext cx="1495044" cy="475488"/>
           </a:xfrm>
           <a:prstGeom prst="roundRect">
             <a:avLst>
@@ -10107,8 +10107,8 @@
         </p:nvSpPr>
         <p:spPr>
           <a:xfrm>
-            <a:off x="9249156" y="2039112"/>
-            <a:ext cx="27432" cy="274320"/>
+            <a:off x="9249156" y="2404872"/>
+            <a:ext cx="27432" cy="420624"/>
           </a:xfrm>
           <a:prstGeom prst="rect">
             <a:avLst/>
@@ -10151,7 +10151,7 @@
         </p:nvSpPr>
         <p:spPr>
           <a:xfrm>
-            <a:off x="9322308" y="2029968"/>
+            <a:off x="9322308" y="2395728"/>
             <a:ext cx="1367028" cy="137160"/>
           </a:xfrm>
           <a:prstGeom prst="rect">
@@ -10187,7 +10187,7 @@
         </p:nvSpPr>
         <p:spPr>
           <a:xfrm>
-            <a:off x="9322308" y="2167128"/>
+            <a:off x="9322308" y="2532888"/>
             <a:ext cx="1367028" cy="137160"/>
           </a:xfrm>
           <a:prstGeom prst="rect">
@@ -10223,8 +10223,8 @@
         </p:nvSpPr>
         <p:spPr>
           <a:xfrm>
-            <a:off x="9249156" y="2368296"/>
-            <a:ext cx="1495044" cy="329184"/>
+            <a:off x="9249156" y="2916936"/>
+            <a:ext cx="1495044" cy="475488"/>
           </a:xfrm>
           <a:prstGeom prst="roundRect">
             <a:avLst>
@@ -10271,8 +10271,8 @@
         </p:nvSpPr>
         <p:spPr>
           <a:xfrm>
-            <a:off x="9249156" y="2395728"/>
-            <a:ext cx="27432" cy="274320"/>
+            <a:off x="9249156" y="2944368"/>
+            <a:ext cx="27432" cy="420624"/>
           </a:xfrm>
           <a:prstGeom prst="rect">
             <a:avLst/>
@@ -10315,7 +10315,7 @@
         </p:nvSpPr>
         <p:spPr>
           <a:xfrm>
-            <a:off x="9322308" y="2386584"/>
+            <a:off x="9322308" y="2935224"/>
             <a:ext cx="1367028" cy="137160"/>
           </a:xfrm>
           <a:prstGeom prst="rect">
@@ -10351,7 +10351,7 @@
         </p:nvSpPr>
         <p:spPr>
           <a:xfrm>
-            <a:off x="9322308" y="2523744"/>
+            <a:off x="9322308" y="3072384"/>
             <a:ext cx="1367028" cy="137160"/>
           </a:xfrm>
           <a:prstGeom prst="rect">
@@ -10387,8 +10387,8 @@
         </p:nvSpPr>
         <p:spPr>
           <a:xfrm>
-            <a:off x="9249156" y="2724912"/>
-            <a:ext cx="1495044" cy="329184"/>
+            <a:off x="9249156" y="3456432"/>
+            <a:ext cx="1495044" cy="475488"/>
           </a:xfrm>
           <a:prstGeom prst="roundRect">
             <a:avLst>
@@ -10435,8 +10435,8 @@
         </p:nvSpPr>
         <p:spPr>
           <a:xfrm>
-            <a:off x="9249156" y="2752344"/>
-            <a:ext cx="27432" cy="274320"/>
+            <a:off x="9249156" y="3483864"/>
+            <a:ext cx="27432" cy="420624"/>
           </a:xfrm>
           <a:prstGeom prst="rect">
             <a:avLst/>
@@ -10479,7 +10479,7 @@
         </p:nvSpPr>
         <p:spPr>
           <a:xfrm>
-            <a:off x="9322308" y="2743200"/>
+            <a:off x="9322308" y="3474720"/>
             <a:ext cx="1367028" cy="137160"/>
           </a:xfrm>
           <a:prstGeom prst="rect">
@@ -10515,7 +10515,7 @@
         </p:nvSpPr>
         <p:spPr>
           <a:xfrm>
-            <a:off x="9322308" y="2880360"/>
+            <a:off x="9322308" y="3611880"/>
             <a:ext cx="1367028" cy="137160"/>
           </a:xfrm>
           <a:prstGeom prst="rect">
@@ -10551,8 +10551,8 @@
         </p:nvSpPr>
         <p:spPr>
           <a:xfrm>
-            <a:off x="9249156" y="3081528"/>
-            <a:ext cx="1495044" cy="329184"/>
+            <a:off x="9249156" y="3995928"/>
+            <a:ext cx="1495044" cy="475488"/>
           </a:xfrm>
           <a:prstGeom prst="roundRect">
             <a:avLst>
@@ -10599,8 +10599,8 @@
         </p:nvSpPr>
         <p:spPr>
           <a:xfrm>
-            <a:off x="9249156" y="3108960"/>
-            <a:ext cx="27432" cy="274320"/>
+            <a:off x="9249156" y="4023360"/>
+            <a:ext cx="27432" cy="420624"/>
           </a:xfrm>
           <a:prstGeom prst="rect">
             <a:avLst/>
@@ -10643,7 +10643,7 @@
         </p:nvSpPr>
         <p:spPr>
           <a:xfrm>
-            <a:off x="9322308" y="3099816"/>
+            <a:off x="9322308" y="4014216"/>
             <a:ext cx="1367028" cy="137160"/>
           </a:xfrm>
           <a:prstGeom prst="rect">
@@ -10679,7 +10679,7 @@
         </p:nvSpPr>
         <p:spPr>
           <a:xfrm>
-            <a:off x="9322308" y="3236976"/>
+            <a:off x="9322308" y="4151376"/>
             <a:ext cx="1367028" cy="137160"/>
           </a:xfrm>
           <a:prstGeom prst="rect">
@@ -10960,7 +10960,7 @@
         <p:spPr>
           <a:xfrm>
             <a:off x="11036808" y="1298448"/>
-            <a:ext cx="1495044" cy="329184"/>
+            <a:ext cx="1495044" cy="475488"/>
           </a:xfrm>
           <a:prstGeom prst="roundRect">
             <a:avLst>
@@ -11008,7 +11008,7 @@
         <p:spPr>
           <a:xfrm>
             <a:off x="11036808" y="1325880"/>
-            <a:ext cx="27432" cy="274320"/>
+            <a:ext cx="27432" cy="420624"/>
           </a:xfrm>
           <a:prstGeom prst="rect">
             <a:avLst/>
@@ -11123,8 +11123,8 @@
         </p:nvSpPr>
         <p:spPr>
           <a:xfrm>
-            <a:off x="11036808" y="1655064"/>
-            <a:ext cx="1495044" cy="329184"/>
+            <a:off x="11036808" y="1837944"/>
+            <a:ext cx="1495044" cy="475488"/>
           </a:xfrm>
           <a:prstGeom prst="roundRect">
             <a:avLst>
@@ -11171,8 +11171,8 @@
         </p:nvSpPr>
         <p:spPr>
           <a:xfrm>
-            <a:off x="11036808" y="1682496"/>
-            <a:ext cx="27432" cy="274320"/>
+            <a:off x="11036808" y="1865376"/>
+            <a:ext cx="27432" cy="420624"/>
           </a:xfrm>
           <a:prstGeom prst="rect">
             <a:avLst/>
@@ -11215,7 +11215,7 @@
         </p:nvSpPr>
         <p:spPr>
           <a:xfrm>
-            <a:off x="11109960" y="1673352"/>
+            <a:off x="11109960" y="1856232"/>
             <a:ext cx="1367028" cy="137160"/>
           </a:xfrm>
           <a:prstGeom prst="rect">
@@ -11251,7 +11251,7 @@
         </p:nvSpPr>
         <p:spPr>
           <a:xfrm>
-            <a:off x="11109960" y="1810512"/>
+            <a:off x="11109960" y="1993392"/>
             <a:ext cx="1367028" cy="137160"/>
           </a:xfrm>
           <a:prstGeom prst="rect">
@@ -11287,8 +11287,8 @@
         </p:nvSpPr>
         <p:spPr>
           <a:xfrm>
-            <a:off x="11036808" y="2011680"/>
-            <a:ext cx="1495044" cy="329184"/>
+            <a:off x="11036808" y="2377440"/>
+            <a:ext cx="1495044" cy="475488"/>
           </a:xfrm>
           <a:prstGeom prst="roundRect">
             <a:avLst>
@@ -11335,8 +11335,8 @@
         </p:nvSpPr>
         <p:spPr>
           <a:xfrm>
-            <a:off x="11036808" y="2039112"/>
-            <a:ext cx="27432" cy="274320"/>
+            <a:off x="11036808" y="2404872"/>
+            <a:ext cx="27432" cy="420624"/>
           </a:xfrm>
           <a:prstGeom prst="rect">
             <a:avLst/>
@@ -11379,7 +11379,7 @@
         </p:nvSpPr>
         <p:spPr>
           <a:xfrm>
-            <a:off x="11109960" y="2029968"/>
+            <a:off x="11109960" y="2395728"/>
             <a:ext cx="1367028" cy="137160"/>
           </a:xfrm>
           <a:prstGeom prst="rect">
@@ -11415,7 +11415,7 @@
         </p:nvSpPr>
         <p:spPr>
           <a:xfrm>
-            <a:off x="11109960" y="2167128"/>
+            <a:off x="11109960" y="2532888"/>
             <a:ext cx="1367028" cy="137160"/>
           </a:xfrm>
           <a:prstGeom prst="rect">
@@ -11451,8 +11451,8 @@
         </p:nvSpPr>
         <p:spPr>
           <a:xfrm>
-            <a:off x="11036808" y="2368296"/>
-            <a:ext cx="1495044" cy="329184"/>
+            <a:off x="11036808" y="2916936"/>
+            <a:ext cx="1495044" cy="475488"/>
           </a:xfrm>
           <a:prstGeom prst="roundRect">
             <a:avLst>
@@ -11499,8 +11499,8 @@
         </p:nvSpPr>
         <p:spPr>
           <a:xfrm>
-            <a:off x="11036808" y="2395728"/>
-            <a:ext cx="27432" cy="274320"/>
+            <a:off x="11036808" y="2944368"/>
+            <a:ext cx="27432" cy="420624"/>
           </a:xfrm>
           <a:prstGeom prst="rect">
             <a:avLst/>
@@ -11543,7 +11543,7 @@
         </p:nvSpPr>
         <p:spPr>
           <a:xfrm>
-            <a:off x="11109960" y="2386584"/>
+            <a:off x="11109960" y="2935224"/>
             <a:ext cx="1367028" cy="137160"/>
           </a:xfrm>
           <a:prstGeom prst="rect">
@@ -11579,7 +11579,7 @@
         </p:nvSpPr>
         <p:spPr>
           <a:xfrm>
-            <a:off x="11109960" y="2523744"/>
+            <a:off x="11109960" y="3072384"/>
             <a:ext cx="1367028" cy="137160"/>
           </a:xfrm>
           <a:prstGeom prst="rect">
@@ -11615,7 +11615,7 @@
         </p:nvSpPr>
         <p:spPr>
           <a:xfrm>
-            <a:off x="12028932" y="2386584"/>
+            <a:off x="12028932" y="2935224"/>
             <a:ext cx="475488" cy="118872"/>
           </a:xfrm>
           <a:prstGeom prst="roundRect">
@@ -11663,7 +11663,7 @@
         </p:nvSpPr>
         <p:spPr>
           <a:xfrm>
-            <a:off x="12028932" y="2386584"/>
+            <a:off x="12028932" y="2935224"/>
             <a:ext cx="475488" cy="118872"/>
           </a:xfrm>
           <a:prstGeom prst="rect">
@@ -11699,8 +11699,8 @@
         </p:nvSpPr>
         <p:spPr>
           <a:xfrm>
-            <a:off x="11036808" y="2724912"/>
-            <a:ext cx="1495044" cy="329184"/>
+            <a:off x="11036808" y="3456432"/>
+            <a:ext cx="1495044" cy="475488"/>
           </a:xfrm>
           <a:prstGeom prst="roundRect">
             <a:avLst>
@@ -11747,8 +11747,8 @@
         </p:nvSpPr>
         <p:spPr>
           <a:xfrm>
-            <a:off x="11036808" y="2752344"/>
-            <a:ext cx="27432" cy="274320"/>
+            <a:off x="11036808" y="3483864"/>
+            <a:ext cx="27432" cy="420624"/>
           </a:xfrm>
           <a:prstGeom prst="rect">
             <a:avLst/>
@@ -11791,7 +11791,7 @@
         </p:nvSpPr>
         <p:spPr>
           <a:xfrm>
-            <a:off x="11109960" y="2743200"/>
+            <a:off x="11109960" y="3474720"/>
             <a:ext cx="1367028" cy="137160"/>
           </a:xfrm>
           <a:prstGeom prst="rect">
@@ -11827,7 +11827,7 @@
         </p:nvSpPr>
         <p:spPr>
           <a:xfrm>
-            <a:off x="11109960" y="2880360"/>
+            <a:off x="11109960" y="3611880"/>
             <a:ext cx="1367028" cy="137160"/>
           </a:xfrm>
           <a:prstGeom prst="rect">
@@ -12072,7 +12072,7 @@
         <p:spPr>
           <a:xfrm>
             <a:off x="12824460" y="1298448"/>
-            <a:ext cx="1495044" cy="329184"/>
+            <a:ext cx="1495044" cy="475488"/>
           </a:xfrm>
           <a:prstGeom prst="roundRect">
             <a:avLst>
@@ -12120,7 +12120,7 @@
         <p:spPr>
           <a:xfrm>
             <a:off x="12824460" y="1325880"/>
-            <a:ext cx="27432" cy="274320"/>
+            <a:ext cx="27432" cy="420624"/>
           </a:xfrm>
           <a:prstGeom prst="rect">
             <a:avLst/>
@@ -12235,8 +12235,8 @@
         </p:nvSpPr>
         <p:spPr>
           <a:xfrm>
-            <a:off x="12824460" y="1655064"/>
-            <a:ext cx="1495044" cy="329184"/>
+            <a:off x="12824460" y="1837944"/>
+            <a:ext cx="1495044" cy="475488"/>
           </a:xfrm>
           <a:prstGeom prst="roundRect">
             <a:avLst>
@@ -12283,8 +12283,8 @@
         </p:nvSpPr>
         <p:spPr>
           <a:xfrm>
-            <a:off x="12824460" y="1682496"/>
-            <a:ext cx="27432" cy="274320"/>
+            <a:off x="12824460" y="1865376"/>
+            <a:ext cx="27432" cy="420624"/>
           </a:xfrm>
           <a:prstGeom prst="rect">
             <a:avLst/>
@@ -12327,7 +12327,7 @@
         </p:nvSpPr>
         <p:spPr>
           <a:xfrm>
-            <a:off x="12897612" y="1673352"/>
+            <a:off x="12897612" y="1856232"/>
             <a:ext cx="1367028" cy="137160"/>
           </a:xfrm>
           <a:prstGeom prst="rect">
@@ -12363,7 +12363,7 @@
         </p:nvSpPr>
         <p:spPr>
           <a:xfrm>
-            <a:off x="12897612" y="1810512"/>
+            <a:off x="12897612" y="1993392"/>
             <a:ext cx="1367028" cy="137160"/>
           </a:xfrm>
           <a:prstGeom prst="rect">
@@ -12399,7 +12399,7 @@
         </p:nvSpPr>
         <p:spPr>
           <a:xfrm>
-            <a:off x="13816584" y="1673352"/>
+            <a:off x="13816584" y="1856232"/>
             <a:ext cx="475488" cy="118872"/>
           </a:xfrm>
           <a:prstGeom prst="roundRect">
@@ -12447,7 +12447,7 @@
         </p:nvSpPr>
         <p:spPr>
           <a:xfrm>
-            <a:off x="13816584" y="1673352"/>
+            <a:off x="13816584" y="1856232"/>
             <a:ext cx="475488" cy="118872"/>
           </a:xfrm>
           <a:prstGeom prst="rect">
@@ -12483,8 +12483,8 @@
         </p:nvSpPr>
         <p:spPr>
           <a:xfrm>
-            <a:off x="12824460" y="2011680"/>
-            <a:ext cx="1495044" cy="329184"/>
+            <a:off x="12824460" y="2377440"/>
+            <a:ext cx="1495044" cy="475488"/>
           </a:xfrm>
           <a:prstGeom prst="roundRect">
             <a:avLst>
@@ -12531,8 +12531,8 @@
         </p:nvSpPr>
         <p:spPr>
           <a:xfrm>
-            <a:off x="12824460" y="2039112"/>
-            <a:ext cx="27432" cy="274320"/>
+            <a:off x="12824460" y="2404872"/>
+            <a:ext cx="27432" cy="420624"/>
           </a:xfrm>
           <a:prstGeom prst="rect">
             <a:avLst/>
@@ -12575,7 +12575,7 @@
         </p:nvSpPr>
         <p:spPr>
           <a:xfrm>
-            <a:off x="12897612" y="2029968"/>
+            <a:off x="12897612" y="2395728"/>
             <a:ext cx="1367028" cy="137160"/>
           </a:xfrm>
           <a:prstGeom prst="rect">
@@ -12611,7 +12611,7 @@
         </p:nvSpPr>
         <p:spPr>
           <a:xfrm>
-            <a:off x="12897612" y="2167128"/>
+            <a:off x="12897612" y="2532888"/>
             <a:ext cx="1367028" cy="137160"/>
           </a:xfrm>
           <a:prstGeom prst="rect">
@@ -12647,8 +12647,8 @@
         </p:nvSpPr>
         <p:spPr>
           <a:xfrm>
-            <a:off x="12824460" y="2368296"/>
-            <a:ext cx="1495044" cy="329184"/>
+            <a:off x="12824460" y="2916936"/>
+            <a:ext cx="1495044" cy="475488"/>
           </a:xfrm>
           <a:prstGeom prst="roundRect">
             <a:avLst>
@@ -12695,8 +12695,8 @@
         </p:nvSpPr>
         <p:spPr>
           <a:xfrm>
-            <a:off x="12824460" y="2395728"/>
-            <a:ext cx="27432" cy="274320"/>
+            <a:off x="12824460" y="2944368"/>
+            <a:ext cx="27432" cy="420624"/>
           </a:xfrm>
           <a:prstGeom prst="rect">
             <a:avLst/>
@@ -12739,7 +12739,7 @@
         </p:nvSpPr>
         <p:spPr>
           <a:xfrm>
-            <a:off x="12897612" y="2386584"/>
+            <a:off x="12897612" y="2935224"/>
             <a:ext cx="1367028" cy="137160"/>
           </a:xfrm>
           <a:prstGeom prst="rect">
@@ -12775,7 +12775,7 @@
         </p:nvSpPr>
         <p:spPr>
           <a:xfrm>
-            <a:off x="12897612" y="2523744"/>
+            <a:off x="12897612" y="3072384"/>
             <a:ext cx="1367028" cy="137160"/>
           </a:xfrm>
           <a:prstGeom prst="rect">
@@ -12811,8 +12811,8 @@
         </p:nvSpPr>
         <p:spPr>
           <a:xfrm>
-            <a:off x="12824460" y="2724912"/>
-            <a:ext cx="1495044" cy="329184"/>
+            <a:off x="12824460" y="3456432"/>
+            <a:ext cx="1495044" cy="475488"/>
           </a:xfrm>
           <a:prstGeom prst="roundRect">
             <a:avLst>
@@ -12859,8 +12859,8 @@
         </p:nvSpPr>
         <p:spPr>
           <a:xfrm>
-            <a:off x="12824460" y="2752344"/>
-            <a:ext cx="27432" cy="274320"/>
+            <a:off x="12824460" y="3483864"/>
+            <a:ext cx="27432" cy="420624"/>
           </a:xfrm>
           <a:prstGeom prst="rect">
             <a:avLst/>
@@ -12903,7 +12903,7 @@
         </p:nvSpPr>
         <p:spPr>
           <a:xfrm>
-            <a:off x="12897612" y="2743200"/>
+            <a:off x="12897612" y="3474720"/>
             <a:ext cx="1367028" cy="137160"/>
           </a:xfrm>
           <a:prstGeom prst="rect">
@@ -12939,7 +12939,7 @@
         </p:nvSpPr>
         <p:spPr>
           <a:xfrm>
-            <a:off x="12897612" y="2880360"/>
+            <a:off x="12897612" y="3611880"/>
             <a:ext cx="1367028" cy="137160"/>
           </a:xfrm>
           <a:prstGeom prst="rect">
@@ -15302,7 +15302,7 @@
         <p:spPr>
           <a:xfrm>
             <a:off x="310896" y="1298448"/>
-            <a:ext cx="1495044" cy="329184"/>
+            <a:ext cx="1495044" cy="475488"/>
           </a:xfrm>
           <a:prstGeom prst="roundRect">
             <a:avLst>
@@ -15350,7 +15350,7 @@
         <p:spPr>
           <a:xfrm>
             <a:off x="310896" y="1325880"/>
-            <a:ext cx="27432" cy="274320"/>
+            <a:ext cx="27432" cy="420624"/>
           </a:xfrm>
           <a:prstGeom prst="rect">
             <a:avLst/>
@@ -15465,8 +15465,8 @@
         </p:nvSpPr>
         <p:spPr>
           <a:xfrm>
-            <a:off x="310896" y="1655064"/>
-            <a:ext cx="1495044" cy="329184"/>
+            <a:off x="310896" y="1837944"/>
+            <a:ext cx="1495044" cy="475488"/>
           </a:xfrm>
           <a:prstGeom prst="roundRect">
             <a:avLst>
@@ -15513,8 +15513,8 @@
         </p:nvSpPr>
         <p:spPr>
           <a:xfrm>
-            <a:off x="310896" y="1682496"/>
-            <a:ext cx="27432" cy="274320"/>
+            <a:off x="310896" y="1865376"/>
+            <a:ext cx="27432" cy="420624"/>
           </a:xfrm>
           <a:prstGeom prst="rect">
             <a:avLst/>
@@ -15557,7 +15557,7 @@
         </p:nvSpPr>
         <p:spPr>
           <a:xfrm>
-            <a:off x="384048" y="1673352"/>
+            <a:off x="384048" y="1856232"/>
             <a:ext cx="1367028" cy="137160"/>
           </a:xfrm>
           <a:prstGeom prst="rect">
@@ -15593,7 +15593,7 @@
         </p:nvSpPr>
         <p:spPr>
           <a:xfrm>
-            <a:off x="384048" y="1810512"/>
+            <a:off x="384048" y="1993392"/>
             <a:ext cx="1367028" cy="137160"/>
           </a:xfrm>
           <a:prstGeom prst="rect">
@@ -15629,8 +15629,8 @@
         </p:nvSpPr>
         <p:spPr>
           <a:xfrm>
-            <a:off x="310896" y="2011680"/>
-            <a:ext cx="1495044" cy="329184"/>
+            <a:off x="310896" y="2377440"/>
+            <a:ext cx="1495044" cy="475488"/>
           </a:xfrm>
           <a:prstGeom prst="roundRect">
             <a:avLst>
@@ -15677,8 +15677,8 @@
         </p:nvSpPr>
         <p:spPr>
           <a:xfrm>
-            <a:off x="310896" y="2039112"/>
-            <a:ext cx="27432" cy="274320"/>
+            <a:off x="310896" y="2404872"/>
+            <a:ext cx="27432" cy="420624"/>
           </a:xfrm>
           <a:prstGeom prst="rect">
             <a:avLst/>
@@ -15721,7 +15721,7 @@
         </p:nvSpPr>
         <p:spPr>
           <a:xfrm>
-            <a:off x="384048" y="2029968"/>
+            <a:off x="384048" y="2395728"/>
             <a:ext cx="1367028" cy="137160"/>
           </a:xfrm>
           <a:prstGeom prst="rect">
@@ -15757,7 +15757,7 @@
         </p:nvSpPr>
         <p:spPr>
           <a:xfrm>
-            <a:off x="384048" y="2167128"/>
+            <a:off x="384048" y="2532888"/>
             <a:ext cx="1367028" cy="137160"/>
           </a:xfrm>
           <a:prstGeom prst="rect">
@@ -16038,7 +16038,7 @@
         <p:spPr>
           <a:xfrm>
             <a:off x="2098548" y="1298448"/>
-            <a:ext cx="1495044" cy="329184"/>
+            <a:ext cx="1495044" cy="475488"/>
           </a:xfrm>
           <a:prstGeom prst="roundRect">
             <a:avLst>
@@ -16086,7 +16086,7 @@
         <p:spPr>
           <a:xfrm>
             <a:off x="2098548" y="1325880"/>
-            <a:ext cx="27432" cy="274320"/>
+            <a:ext cx="27432" cy="420624"/>
           </a:xfrm>
           <a:prstGeom prst="rect">
             <a:avLst/>
@@ -16285,8 +16285,8 @@
         </p:nvSpPr>
         <p:spPr>
           <a:xfrm>
-            <a:off x="2098548" y="1655064"/>
-            <a:ext cx="1495044" cy="329184"/>
+            <a:off x="2098548" y="1837944"/>
+            <a:ext cx="1495044" cy="475488"/>
           </a:xfrm>
           <a:prstGeom prst="roundRect">
             <a:avLst>
@@ -16333,8 +16333,8 @@
         </p:nvSpPr>
         <p:spPr>
           <a:xfrm>
-            <a:off x="2098548" y="1682496"/>
-            <a:ext cx="27432" cy="274320"/>
+            <a:off x="2098548" y="1865376"/>
+            <a:ext cx="27432" cy="420624"/>
           </a:xfrm>
           <a:prstGeom prst="rect">
             <a:avLst/>
@@ -16377,7 +16377,7 @@
         </p:nvSpPr>
         <p:spPr>
           <a:xfrm>
-            <a:off x="2171700" y="1673352"/>
+            <a:off x="2171700" y="1856232"/>
             <a:ext cx="1367028" cy="137160"/>
           </a:xfrm>
           <a:prstGeom prst="rect">
@@ -16413,7 +16413,7 @@
         </p:nvSpPr>
         <p:spPr>
           <a:xfrm>
-            <a:off x="2171700" y="1810512"/>
+            <a:off x="2171700" y="1993392"/>
             <a:ext cx="1367028" cy="137160"/>
           </a:xfrm>
           <a:prstGeom prst="rect">
@@ -16449,8 +16449,8 @@
         </p:nvSpPr>
         <p:spPr>
           <a:xfrm>
-            <a:off x="2098548" y="2011680"/>
-            <a:ext cx="1495044" cy="329184"/>
+            <a:off x="2098548" y="2377440"/>
+            <a:ext cx="1495044" cy="475488"/>
           </a:xfrm>
           <a:prstGeom prst="roundRect">
             <a:avLst>
@@ -16497,8 +16497,8 @@
         </p:nvSpPr>
         <p:spPr>
           <a:xfrm>
-            <a:off x="2098548" y="2039112"/>
-            <a:ext cx="27432" cy="274320"/>
+            <a:off x="2098548" y="2404872"/>
+            <a:ext cx="27432" cy="420624"/>
           </a:xfrm>
           <a:prstGeom prst="rect">
             <a:avLst/>
@@ -16541,7 +16541,7 @@
         </p:nvSpPr>
         <p:spPr>
           <a:xfrm>
-            <a:off x="2171700" y="2029968"/>
+            <a:off x="2171700" y="2395728"/>
             <a:ext cx="1367028" cy="137160"/>
           </a:xfrm>
           <a:prstGeom prst="rect">
@@ -16577,7 +16577,7 @@
         </p:nvSpPr>
         <p:spPr>
           <a:xfrm>
-            <a:off x="2171700" y="2167128"/>
+            <a:off x="2171700" y="2532888"/>
             <a:ext cx="1367028" cy="137160"/>
           </a:xfrm>
           <a:prstGeom prst="rect">
@@ -16858,7 +16858,7 @@
         <p:spPr>
           <a:xfrm>
             <a:off x="3886200" y="1298448"/>
-            <a:ext cx="1495044" cy="329184"/>
+            <a:ext cx="1495044" cy="475488"/>
           </a:xfrm>
           <a:prstGeom prst="roundRect">
             <a:avLst>
@@ -16906,7 +16906,7 @@
         <p:spPr>
           <a:xfrm>
             <a:off x="3886200" y="1325880"/>
-            <a:ext cx="27432" cy="274320"/>
+            <a:ext cx="27432" cy="420624"/>
           </a:xfrm>
           <a:prstGeom prst="rect">
             <a:avLst/>
@@ -17021,8 +17021,8 @@
         </p:nvSpPr>
         <p:spPr>
           <a:xfrm>
-            <a:off x="3886200" y="1655064"/>
-            <a:ext cx="1495044" cy="329184"/>
+            <a:off x="3886200" y="1837944"/>
+            <a:ext cx="1495044" cy="475488"/>
           </a:xfrm>
           <a:prstGeom prst="roundRect">
             <a:avLst>
@@ -17069,8 +17069,8 @@
         </p:nvSpPr>
         <p:spPr>
           <a:xfrm>
-            <a:off x="3886200" y="1682496"/>
-            <a:ext cx="27432" cy="274320"/>
+            <a:off x="3886200" y="1865376"/>
+            <a:ext cx="27432" cy="420624"/>
           </a:xfrm>
           <a:prstGeom prst="rect">
             <a:avLst/>
@@ -17113,7 +17113,7 @@
         </p:nvSpPr>
         <p:spPr>
           <a:xfrm>
-            <a:off x="3959352" y="1673352"/>
+            <a:off x="3959352" y="1856232"/>
             <a:ext cx="1367028" cy="137160"/>
           </a:xfrm>
           <a:prstGeom prst="rect">
@@ -17149,7 +17149,7 @@
         </p:nvSpPr>
         <p:spPr>
           <a:xfrm>
-            <a:off x="3959352" y="1810512"/>
+            <a:off x="3959352" y="1993392"/>
             <a:ext cx="1367028" cy="137160"/>
           </a:xfrm>
           <a:prstGeom prst="rect">
@@ -17430,7 +17430,7 @@
         <p:spPr>
           <a:xfrm>
             <a:off x="5673852" y="1298448"/>
-            <a:ext cx="1495044" cy="329184"/>
+            <a:ext cx="1495044" cy="475488"/>
           </a:xfrm>
           <a:prstGeom prst="roundRect">
             <a:avLst>
@@ -17478,7 +17478,7 @@
         <p:spPr>
           <a:xfrm>
             <a:off x="5673852" y="1325880"/>
-            <a:ext cx="27432" cy="274320"/>
+            <a:ext cx="27432" cy="420624"/>
           </a:xfrm>
           <a:prstGeom prst="rect">
             <a:avLst/>
@@ -17593,8 +17593,8 @@
         </p:nvSpPr>
         <p:spPr>
           <a:xfrm>
-            <a:off x="5673852" y="1655064"/>
-            <a:ext cx="1495044" cy="329184"/>
+            <a:off x="5673852" y="1837944"/>
+            <a:ext cx="1495044" cy="475488"/>
           </a:xfrm>
           <a:prstGeom prst="roundRect">
             <a:avLst>
@@ -17641,8 +17641,8 @@
         </p:nvSpPr>
         <p:spPr>
           <a:xfrm>
-            <a:off x="5673852" y="1682496"/>
-            <a:ext cx="27432" cy="274320"/>
+            <a:off x="5673852" y="1865376"/>
+            <a:ext cx="27432" cy="420624"/>
           </a:xfrm>
           <a:prstGeom prst="rect">
             <a:avLst/>
@@ -17685,7 +17685,7 @@
         </p:nvSpPr>
         <p:spPr>
           <a:xfrm>
-            <a:off x="5747004" y="1673352"/>
+            <a:off x="5747004" y="1856232"/>
             <a:ext cx="1367028" cy="137160"/>
           </a:xfrm>
           <a:prstGeom prst="rect">
@@ -17721,7 +17721,7 @@
         </p:nvSpPr>
         <p:spPr>
           <a:xfrm>
-            <a:off x="5747004" y="1810512"/>
+            <a:off x="5747004" y="1993392"/>
             <a:ext cx="1367028" cy="137160"/>
           </a:xfrm>
           <a:prstGeom prst="rect">
@@ -17757,8 +17757,8 @@
         </p:nvSpPr>
         <p:spPr>
           <a:xfrm>
-            <a:off x="5673852" y="2011680"/>
-            <a:ext cx="1495044" cy="329184"/>
+            <a:off x="5673852" y="2377440"/>
+            <a:ext cx="1495044" cy="475488"/>
           </a:xfrm>
           <a:prstGeom prst="roundRect">
             <a:avLst>
@@ -17805,8 +17805,8 @@
         </p:nvSpPr>
         <p:spPr>
           <a:xfrm>
-            <a:off x="5673852" y="2039112"/>
-            <a:ext cx="27432" cy="274320"/>
+            <a:off x="5673852" y="2404872"/>
+            <a:ext cx="27432" cy="420624"/>
           </a:xfrm>
           <a:prstGeom prst="rect">
             <a:avLst/>
@@ -17849,7 +17849,7 @@
         </p:nvSpPr>
         <p:spPr>
           <a:xfrm>
-            <a:off x="5747004" y="2029968"/>
+            <a:off x="5747004" y="2395728"/>
             <a:ext cx="1367028" cy="137160"/>
           </a:xfrm>
           <a:prstGeom prst="rect">
@@ -17885,7 +17885,7 @@
         </p:nvSpPr>
         <p:spPr>
           <a:xfrm>
-            <a:off x="5747004" y="2167128"/>
+            <a:off x="5747004" y="2532888"/>
             <a:ext cx="1367028" cy="137160"/>
           </a:xfrm>
           <a:prstGeom prst="rect">
@@ -17921,8 +17921,8 @@
         </p:nvSpPr>
         <p:spPr>
           <a:xfrm>
-            <a:off x="5673852" y="2368296"/>
-            <a:ext cx="1495044" cy="329184"/>
+            <a:off x="5673852" y="2916936"/>
+            <a:ext cx="1495044" cy="475488"/>
           </a:xfrm>
           <a:prstGeom prst="roundRect">
             <a:avLst>
@@ -17969,8 +17969,8 @@
         </p:nvSpPr>
         <p:spPr>
           <a:xfrm>
-            <a:off x="5673852" y="2395728"/>
-            <a:ext cx="27432" cy="274320"/>
+            <a:off x="5673852" y="2944368"/>
+            <a:ext cx="27432" cy="420624"/>
           </a:xfrm>
           <a:prstGeom prst="rect">
             <a:avLst/>
@@ -18013,7 +18013,7 @@
         </p:nvSpPr>
         <p:spPr>
           <a:xfrm>
-            <a:off x="5747004" y="2386584"/>
+            <a:off x="5747004" y="2935224"/>
             <a:ext cx="1367028" cy="137160"/>
           </a:xfrm>
           <a:prstGeom prst="rect">
@@ -18049,7 +18049,7 @@
         </p:nvSpPr>
         <p:spPr>
           <a:xfrm>
-            <a:off x="5747004" y="2523744"/>
+            <a:off x="5747004" y="3072384"/>
             <a:ext cx="1367028" cy="137160"/>
           </a:xfrm>
           <a:prstGeom prst="rect">
@@ -18330,7 +18330,7 @@
         <p:spPr>
           <a:xfrm>
             <a:off x="7461504" y="1298448"/>
-            <a:ext cx="1495044" cy="329184"/>
+            <a:ext cx="1495044" cy="475488"/>
           </a:xfrm>
           <a:prstGeom prst="roundRect">
             <a:avLst>
@@ -18378,7 +18378,7 @@
         <p:spPr>
           <a:xfrm>
             <a:off x="7461504" y="1325880"/>
-            <a:ext cx="27432" cy="274320"/>
+            <a:ext cx="27432" cy="420624"/>
           </a:xfrm>
           <a:prstGeom prst="rect">
             <a:avLst/>
@@ -18493,8 +18493,8 @@
         </p:nvSpPr>
         <p:spPr>
           <a:xfrm>
-            <a:off x="7461504" y="1655064"/>
-            <a:ext cx="1495044" cy="329184"/>
+            <a:off x="7461504" y="1837944"/>
+            <a:ext cx="1495044" cy="475488"/>
           </a:xfrm>
           <a:prstGeom prst="roundRect">
             <a:avLst>
@@ -18541,8 +18541,8 @@
         </p:nvSpPr>
         <p:spPr>
           <a:xfrm>
-            <a:off x="7461504" y="1682496"/>
-            <a:ext cx="27432" cy="274320"/>
+            <a:off x="7461504" y="1865376"/>
+            <a:ext cx="27432" cy="420624"/>
           </a:xfrm>
           <a:prstGeom prst="rect">
             <a:avLst/>
@@ -18585,7 +18585,7 @@
         </p:nvSpPr>
         <p:spPr>
           <a:xfrm>
-            <a:off x="7534656" y="1673352"/>
+            <a:off x="7534656" y="1856232"/>
             <a:ext cx="1367028" cy="137160"/>
           </a:xfrm>
           <a:prstGeom prst="rect">
@@ -18621,7 +18621,7 @@
         </p:nvSpPr>
         <p:spPr>
           <a:xfrm>
-            <a:off x="7534656" y="1810512"/>
+            <a:off x="7534656" y="1993392"/>
             <a:ext cx="1367028" cy="137160"/>
           </a:xfrm>
           <a:prstGeom prst="rect">
@@ -18902,7 +18902,7 @@
         <p:spPr>
           <a:xfrm>
             <a:off x="9249156" y="1298448"/>
-            <a:ext cx="1495044" cy="329184"/>
+            <a:ext cx="1495044" cy="475488"/>
           </a:xfrm>
           <a:prstGeom prst="roundRect">
             <a:avLst>
@@ -18950,7 +18950,7 @@
         <p:spPr>
           <a:xfrm>
             <a:off x="9249156" y="1325880"/>
-            <a:ext cx="27432" cy="274320"/>
+            <a:ext cx="27432" cy="420624"/>
           </a:xfrm>
           <a:prstGeom prst="rect">
             <a:avLst/>
@@ -19065,8 +19065,8 @@
         </p:nvSpPr>
         <p:spPr>
           <a:xfrm>
-            <a:off x="9249156" y="1655064"/>
-            <a:ext cx="1495044" cy="329184"/>
+            <a:off x="9249156" y="1837944"/>
+            <a:ext cx="1495044" cy="475488"/>
           </a:xfrm>
           <a:prstGeom prst="roundRect">
             <a:avLst>
@@ -19113,8 +19113,8 @@
         </p:nvSpPr>
         <p:spPr>
           <a:xfrm>
-            <a:off x="9249156" y="1682496"/>
-            <a:ext cx="27432" cy="274320"/>
+            <a:off x="9249156" y="1865376"/>
+            <a:ext cx="27432" cy="420624"/>
           </a:xfrm>
           <a:prstGeom prst="rect">
             <a:avLst/>
@@ -19157,7 +19157,7 @@
         </p:nvSpPr>
         <p:spPr>
           <a:xfrm>
-            <a:off x="9322308" y="1673352"/>
+            <a:off x="9322308" y="1856232"/>
             <a:ext cx="1367028" cy="137160"/>
           </a:xfrm>
           <a:prstGeom prst="rect">
@@ -19193,7 +19193,7 @@
         </p:nvSpPr>
         <p:spPr>
           <a:xfrm>
-            <a:off x="9322308" y="1810512"/>
+            <a:off x="9322308" y="1993392"/>
             <a:ext cx="1367028" cy="137160"/>
           </a:xfrm>
           <a:prstGeom prst="rect">
@@ -19474,7 +19474,7 @@
         <p:spPr>
           <a:xfrm>
             <a:off x="11036808" y="1298448"/>
-            <a:ext cx="1495044" cy="329184"/>
+            <a:ext cx="1495044" cy="475488"/>
           </a:xfrm>
           <a:prstGeom prst="roundRect">
             <a:avLst>
@@ -19522,7 +19522,7 @@
         <p:spPr>
           <a:xfrm>
             <a:off x="11036808" y="1325880"/>
-            <a:ext cx="27432" cy="274320"/>
+            <a:ext cx="27432" cy="420624"/>
           </a:xfrm>
           <a:prstGeom prst="rect">
             <a:avLst/>
@@ -19637,8 +19637,8 @@
         </p:nvSpPr>
         <p:spPr>
           <a:xfrm>
-            <a:off x="11036808" y="1655064"/>
-            <a:ext cx="1495044" cy="329184"/>
+            <a:off x="11036808" y="1837944"/>
+            <a:ext cx="1495044" cy="475488"/>
           </a:xfrm>
           <a:prstGeom prst="roundRect">
             <a:avLst>
@@ -19685,8 +19685,8 @@
         </p:nvSpPr>
         <p:spPr>
           <a:xfrm>
-            <a:off x="11036808" y="1682496"/>
-            <a:ext cx="27432" cy="274320"/>
+            <a:off x="11036808" y="1865376"/>
+            <a:ext cx="27432" cy="420624"/>
           </a:xfrm>
           <a:prstGeom prst="rect">
             <a:avLst/>
@@ -19729,7 +19729,7 @@
         </p:nvSpPr>
         <p:spPr>
           <a:xfrm>
-            <a:off x="11109960" y="1673352"/>
+            <a:off x="11109960" y="1856232"/>
             <a:ext cx="1367028" cy="137160"/>
           </a:xfrm>
           <a:prstGeom prst="rect">
@@ -19765,7 +19765,7 @@
         </p:nvSpPr>
         <p:spPr>
           <a:xfrm>
-            <a:off x="11109960" y="1810512"/>
+            <a:off x="11109960" y="1993392"/>
             <a:ext cx="1367028" cy="137160"/>
           </a:xfrm>
           <a:prstGeom prst="rect">
@@ -19801,8 +19801,8 @@
         </p:nvSpPr>
         <p:spPr>
           <a:xfrm>
-            <a:off x="11036808" y="2011680"/>
-            <a:ext cx="1495044" cy="329184"/>
+            <a:off x="11036808" y="2377440"/>
+            <a:ext cx="1495044" cy="475488"/>
           </a:xfrm>
           <a:prstGeom prst="roundRect">
             <a:avLst>
@@ -19849,8 +19849,8 @@
         </p:nvSpPr>
         <p:spPr>
           <a:xfrm>
-            <a:off x="11036808" y="2039112"/>
-            <a:ext cx="27432" cy="274320"/>
+            <a:off x="11036808" y="2404872"/>
+            <a:ext cx="27432" cy="420624"/>
           </a:xfrm>
           <a:prstGeom prst="rect">
             <a:avLst/>
@@ -19893,7 +19893,7 @@
         </p:nvSpPr>
         <p:spPr>
           <a:xfrm>
-            <a:off x="11109960" y="2029968"/>
+            <a:off x="11109960" y="2395728"/>
             <a:ext cx="1367028" cy="137160"/>
           </a:xfrm>
           <a:prstGeom prst="rect">
@@ -19929,7 +19929,7 @@
         </p:nvSpPr>
         <p:spPr>
           <a:xfrm>
-            <a:off x="11109960" y="2167128"/>
+            <a:off x="11109960" y="2532888"/>
             <a:ext cx="1367028" cy="137160"/>
           </a:xfrm>
           <a:prstGeom prst="rect">
@@ -19965,8 +19965,8 @@
         </p:nvSpPr>
         <p:spPr>
           <a:xfrm>
-            <a:off x="11036808" y="2368296"/>
-            <a:ext cx="1495044" cy="329184"/>
+            <a:off x="11036808" y="2916936"/>
+            <a:ext cx="1495044" cy="475488"/>
           </a:xfrm>
           <a:prstGeom prst="roundRect">
             <a:avLst>
@@ -20013,8 +20013,8 @@
         </p:nvSpPr>
         <p:spPr>
           <a:xfrm>
-            <a:off x="11036808" y="2395728"/>
-            <a:ext cx="27432" cy="274320"/>
+            <a:off x="11036808" y="2944368"/>
+            <a:ext cx="27432" cy="420624"/>
           </a:xfrm>
           <a:prstGeom prst="rect">
             <a:avLst/>
@@ -20057,7 +20057,7 @@
         </p:nvSpPr>
         <p:spPr>
           <a:xfrm>
-            <a:off x="11109960" y="2386584"/>
+            <a:off x="11109960" y="2935224"/>
             <a:ext cx="1367028" cy="137160"/>
           </a:xfrm>
           <a:prstGeom prst="rect">
@@ -20093,7 +20093,7 @@
         </p:nvSpPr>
         <p:spPr>
           <a:xfrm>
-            <a:off x="11109960" y="2523744"/>
+            <a:off x="11109960" y="3072384"/>
             <a:ext cx="1367028" cy="137160"/>
           </a:xfrm>
           <a:prstGeom prst="rect">
@@ -20374,7 +20374,7 @@
         <p:spPr>
           <a:xfrm>
             <a:off x="12824460" y="1298448"/>
-            <a:ext cx="1495044" cy="329184"/>
+            <a:ext cx="1495044" cy="475488"/>
           </a:xfrm>
           <a:prstGeom prst="roundRect">
             <a:avLst>
@@ -20422,7 +20422,7 @@
         <p:spPr>
           <a:xfrm>
             <a:off x="12824460" y="1325880"/>
-            <a:ext cx="27432" cy="274320"/>
+            <a:ext cx="27432" cy="420624"/>
           </a:xfrm>
           <a:prstGeom prst="rect">
             <a:avLst/>
@@ -20537,8 +20537,8 @@
         </p:nvSpPr>
         <p:spPr>
           <a:xfrm>
-            <a:off x="12824460" y="1655064"/>
-            <a:ext cx="1495044" cy="329184"/>
+            <a:off x="12824460" y="1837944"/>
+            <a:ext cx="1495044" cy="475488"/>
           </a:xfrm>
           <a:prstGeom prst="roundRect">
             <a:avLst>
@@ -20585,8 +20585,8 @@
         </p:nvSpPr>
         <p:spPr>
           <a:xfrm>
-            <a:off x="12824460" y="1682496"/>
-            <a:ext cx="27432" cy="274320"/>
+            <a:off x="12824460" y="1865376"/>
+            <a:ext cx="27432" cy="420624"/>
           </a:xfrm>
           <a:prstGeom prst="rect">
             <a:avLst/>
@@ -20629,7 +20629,7 @@
         </p:nvSpPr>
         <p:spPr>
           <a:xfrm>
-            <a:off x="12897612" y="1673352"/>
+            <a:off x="12897612" y="1856232"/>
             <a:ext cx="1367028" cy="137160"/>
           </a:xfrm>
           <a:prstGeom prst="rect">
@@ -20665,7 +20665,7 @@
         </p:nvSpPr>
         <p:spPr>
           <a:xfrm>
-            <a:off x="12897612" y="1810512"/>
+            <a:off x="12897612" y="1993392"/>
             <a:ext cx="1367028" cy="137160"/>
           </a:xfrm>
           <a:prstGeom prst="rect">
@@ -20701,8 +20701,8 @@
         </p:nvSpPr>
         <p:spPr>
           <a:xfrm>
-            <a:off x="12824460" y="2011680"/>
-            <a:ext cx="1495044" cy="329184"/>
+            <a:off x="12824460" y="2377440"/>
+            <a:ext cx="1495044" cy="475488"/>
           </a:xfrm>
           <a:prstGeom prst="roundRect">
             <a:avLst>
@@ -20749,8 +20749,8 @@
         </p:nvSpPr>
         <p:spPr>
           <a:xfrm>
-            <a:off x="12824460" y="2039112"/>
-            <a:ext cx="27432" cy="274320"/>
+            <a:off x="12824460" y="2404872"/>
+            <a:ext cx="27432" cy="420624"/>
           </a:xfrm>
           <a:prstGeom prst="rect">
             <a:avLst/>
@@ -20793,7 +20793,7 @@
         </p:nvSpPr>
         <p:spPr>
           <a:xfrm>
-            <a:off x="12897612" y="2029968"/>
+            <a:off x="12897612" y="2395728"/>
             <a:ext cx="1367028" cy="137160"/>
           </a:xfrm>
           <a:prstGeom prst="rect">
@@ -20829,7 +20829,7 @@
         </p:nvSpPr>
         <p:spPr>
           <a:xfrm>
-            <a:off x="12897612" y="2167128"/>
+            <a:off x="12897612" y="2532888"/>
             <a:ext cx="1367028" cy="137160"/>
           </a:xfrm>
           <a:prstGeom prst="rect">
